--- a/ADG/_실측판/08장/8장_Primary구조변경의Standby반영.pptx
+++ b/ADG/_실측판/08장/8장_Primary구조변경의Standby반영.pptx
@@ -5816,7 +5816,26 @@
                 </a:solidFill>
                 <a:latin typeface="맑은 고딕"/>
               </a:rPr>
-              <a:t>•  Standby에 `$ORACLE_HOME/dbs/UNNAMED00016` (0바이트)</a:t>
+              <a:t>•  Standby에 </a:t>
+            </a:r>
+            <a:r>
+              <a:rPr sz="1700" b="0">
+                <a:solidFill>
+                  <a:srgbClr val="222222"/>
+                </a:solidFill>
+                <a:latin typeface="Consolas"/>
+                <a:cs typeface="Consolas"/>
+              </a:rPr>
+              <a:t>$ORACLE_HOME/dbs/UNNAMED00016</a:t>
+            </a:r>
+            <a:r>
+              <a:rPr sz="1700" b="0">
+                <a:solidFill>
+                  <a:srgbClr val="222222"/>
+                </a:solidFill>
+                <a:latin typeface="맑은 고딕"/>
+              </a:rPr>
+              <a:t> (0바이트)</a:t>
             </a:r>
           </a:p>
           <a:p>
@@ -5832,7 +5851,26 @@
                 </a:solidFill>
                 <a:latin typeface="맑은 고딕"/>
               </a:rPr>
-              <a:t>•  이름 규칙 : `UNNAMED` + 파일 번호 5자리</a:t>
+              <a:t>•  이름 규칙 : </a:t>
+            </a:r>
+            <a:r>
+              <a:rPr sz="1700" b="0">
+                <a:solidFill>
+                  <a:srgbClr val="222222"/>
+                </a:solidFill>
+                <a:latin typeface="Consolas"/>
+                <a:cs typeface="Consolas"/>
+              </a:rPr>
+              <a:t>UNNAMED</a:t>
+            </a:r>
+            <a:r>
+              <a:rPr sz="1700" b="0">
+                <a:solidFill>
+                  <a:srgbClr val="222222"/>
+                </a:solidFill>
+                <a:latin typeface="맑은 고딕"/>
+              </a:rPr>
+              <a:t> + 파일 번호 5자리</a:t>
             </a:r>
           </a:p>
           <a:p>
@@ -5848,7 +5886,25 @@
                 </a:solidFill>
                 <a:latin typeface="맑은 고딕"/>
               </a:rPr>
-              <a:t>•  **MRP0이 사라진다** — 적용이 죽었다</a:t>
+              <a:t>•  </a:t>
+            </a:r>
+            <a:r>
+              <a:rPr sz="1700" b="1">
+                <a:solidFill>
+                  <a:srgbClr val="222222"/>
+                </a:solidFill>
+                <a:latin typeface="맑은 고딕"/>
+              </a:rPr>
+              <a:t>MRP0이 사라진다</a:t>
+            </a:r>
+            <a:r>
+              <a:rPr sz="1700" b="0">
+                <a:solidFill>
+                  <a:srgbClr val="222222"/>
+                </a:solidFill>
+                <a:latin typeface="맑은 고딕"/>
+              </a:rPr>
+              <a:t> — 적용이 죽었다</a:t>
             </a:r>
           </a:p>
         </p:txBody>
@@ -6027,7 +6083,17 @@
                 </a:solidFill>
                 <a:latin typeface="맑은 고딕"/>
               </a:rPr>
-              <a:t>•  `MRP0: Background Media Recovery terminated with error 1274`</a:t>
+              <a:t>•  </a:t>
+            </a:r>
+            <a:r>
+              <a:rPr sz="1700" b="0">
+                <a:solidFill>
+                  <a:srgbClr val="222222"/>
+                </a:solidFill>
+                <a:latin typeface="Consolas"/>
+                <a:cs typeface="Consolas"/>
+              </a:rPr>
+              <a:t>MRP0: Background Media Recovery terminated with error 1274</a:t>
             </a:r>
           </a:p>
           <a:p>
@@ -6043,7 +6109,25 @@
                 </a:solidFill>
                 <a:latin typeface="맑은 고딕"/>
               </a:rPr>
-              <a:t>•  Primary 쪽 목적지는 계속 **VALID**, ERROR 열도 비어 있다</a:t>
+              <a:t>•  Primary 쪽 목적지는 계속 </a:t>
+            </a:r>
+            <a:r>
+              <a:rPr sz="1700" b="1">
+                <a:solidFill>
+                  <a:srgbClr val="222222"/>
+                </a:solidFill>
+                <a:latin typeface="맑은 고딕"/>
+              </a:rPr>
+              <a:t>VALID</a:t>
+            </a:r>
+            <a:r>
+              <a:rPr sz="1700" b="0">
+                <a:solidFill>
+                  <a:srgbClr val="222222"/>
+                </a:solidFill>
+                <a:latin typeface="맑은 고딕"/>
+              </a:rPr>
+              <a:t>, ERROR 열도 비어 있다</a:t>
             </a:r>
           </a:p>
           <a:p>
@@ -6059,7 +6143,16 @@
                 </a:solidFill>
                 <a:latin typeface="맑은 고딕"/>
               </a:rPr>
-              <a:t>•  전송은 정상이고 **적용만 안 되기 때문**</a:t>
+              <a:t>•  전송은 정상이고 </a:t>
+            </a:r>
+            <a:r>
+              <a:rPr sz="1700" b="1">
+                <a:solidFill>
+                  <a:srgbClr val="222222"/>
+                </a:solidFill>
+                <a:latin typeface="맑은 고딕"/>
+              </a:rPr>
+              <a:t>적용만 안 되기 때문</a:t>
             </a:r>
           </a:p>
           <a:p>
@@ -6254,7 +6347,16 @@
                 </a:solidFill>
                 <a:latin typeface="맑은 고딕"/>
               </a:rPr>
-              <a:t>•  파라미터를 AUTO로, MRP 재기동 → **또 죽는다**</a:t>
+              <a:t>•  파라미터를 AUTO로, MRP 재기동 → </a:t>
+            </a:r>
+            <a:r>
+              <a:rPr sz="1700" b="1">
+                <a:solidFill>
+                  <a:srgbClr val="222222"/>
+                </a:solidFill>
+                <a:latin typeface="맑은 고딕"/>
+              </a:rPr>
+              <a:t>또 죽는다</a:t>
             </a:r>
           </a:p>
           <a:p>
@@ -6270,7 +6372,16 @@
                 </a:solidFill>
                 <a:latin typeface="맑은 고딕"/>
               </a:rPr>
-              <a:t>•  오류가 **1274에서 1111로 바뀐다**</a:t>
+              <a:t>•  오류가 </a:t>
+            </a:r>
+            <a:r>
+              <a:rPr sz="1700" b="1">
+                <a:solidFill>
+                  <a:srgbClr val="222222"/>
+                </a:solidFill>
+                <a:latin typeface="맑은 고딕"/>
+              </a:rPr>
+              <a:t>1274에서 1111로 바뀐다</a:t>
             </a:r>
           </a:p>
           <a:p>
@@ -6481,7 +6592,35 @@
                 </a:solidFill>
                 <a:latin typeface="맑은 고딕"/>
               </a:rPr>
-              <a:t>•  `V$DATAFILE.STATUS` = **RECOVER**</a:t>
+              <a:t>•  </a:t>
+            </a:r>
+            <a:r>
+              <a:rPr sz="1700" b="0">
+                <a:solidFill>
+                  <a:srgbClr val="222222"/>
+                </a:solidFill>
+                <a:latin typeface="Consolas"/>
+                <a:cs typeface="Consolas"/>
+              </a:rPr>
+              <a:t>V$DATAFILE.STATUS</a:t>
+            </a:r>
+            <a:r>
+              <a:rPr sz="1700" b="0">
+                <a:solidFill>
+                  <a:srgbClr val="222222"/>
+                </a:solidFill>
+                <a:latin typeface="맑은 고딕"/>
+              </a:rPr>
+              <a:t> = </a:t>
+            </a:r>
+            <a:r>
+              <a:rPr sz="1700" b="1">
+                <a:solidFill>
+                  <a:srgbClr val="222222"/>
+                </a:solidFill>
+                <a:latin typeface="맑은 고딕"/>
+              </a:rPr>
+              <a:t>RECOVER</a:t>
             </a:r>
           </a:p>
           <a:p>
@@ -6497,7 +6636,35 @@
                 </a:solidFill>
                 <a:latin typeface="맑은 고딕"/>
               </a:rPr>
-              <a:t>•  `V$DATAFILE_HEADER.ERROR` = **FILE MISSING**</a:t>
+              <a:t>•  </a:t>
+            </a:r>
+            <a:r>
+              <a:rPr sz="1700" b="0">
+                <a:solidFill>
+                  <a:srgbClr val="222222"/>
+                </a:solidFill>
+                <a:latin typeface="Consolas"/>
+                <a:cs typeface="Consolas"/>
+              </a:rPr>
+              <a:t>V$DATAFILE_HEADER.ERROR</a:t>
+            </a:r>
+            <a:r>
+              <a:rPr sz="1700" b="0">
+                <a:solidFill>
+                  <a:srgbClr val="222222"/>
+                </a:solidFill>
+                <a:latin typeface="맑은 고딕"/>
+              </a:rPr>
+              <a:t> = </a:t>
+            </a:r>
+            <a:r>
+              <a:rPr sz="1700" b="1">
+                <a:solidFill>
+                  <a:srgbClr val="222222"/>
+                </a:solidFill>
+                <a:latin typeface="맑은 고딕"/>
+              </a:rPr>
+              <a:t>FILE MISSING</a:t>
             </a:r>
           </a:p>
           <a:p>
@@ -6513,7 +6680,35 @@
                 </a:solidFill>
                 <a:latin typeface="맑은 고딕"/>
               </a:rPr>
-              <a:t>•  `V$RECOVER_FILE` → **no rows selected**</a:t>
+              <a:t>•  </a:t>
+            </a:r>
+            <a:r>
+              <a:rPr sz="1700" b="0">
+                <a:solidFill>
+                  <a:srgbClr val="222222"/>
+                </a:solidFill>
+                <a:latin typeface="Consolas"/>
+                <a:cs typeface="Consolas"/>
+              </a:rPr>
+              <a:t>V$RECOVER_FILE</a:t>
+            </a:r>
+            <a:r>
+              <a:rPr sz="1700" b="0">
+                <a:solidFill>
+                  <a:srgbClr val="222222"/>
+                </a:solidFill>
+                <a:latin typeface="맑은 고딕"/>
+              </a:rPr>
+              <a:t> → </a:t>
+            </a:r>
+            <a:r>
+              <a:rPr sz="1700" b="1">
+                <a:solidFill>
+                  <a:srgbClr val="222222"/>
+                </a:solidFill>
+                <a:latin typeface="맑은 고딕"/>
+              </a:rPr>
+              <a:t>no rows selected</a:t>
             </a:r>
           </a:p>
           <a:p>
@@ -6963,7 +7158,26 @@
                 </a:solidFill>
                 <a:latin typeface="맑은 고딕"/>
               </a:rPr>
-              <a:t>•  ① `STANDBY_FILE_MANAGEMENT` = MANUAL</a:t>
+              <a:t>•  ① </a:t>
+            </a:r>
+            <a:r>
+              <a:rPr sz="1700" b="0">
+                <a:solidFill>
+                  <a:srgbClr val="222222"/>
+                </a:solidFill>
+                <a:latin typeface="Consolas"/>
+                <a:cs typeface="Consolas"/>
+              </a:rPr>
+              <a:t>STANDBY_FILE_MANAGEMENT</a:t>
+            </a:r>
+            <a:r>
+              <a:rPr sz="1700" b="0">
+                <a:solidFill>
+                  <a:srgbClr val="222222"/>
+                </a:solidFill>
+                <a:latin typeface="맑은 고딕"/>
+              </a:rPr>
+              <a:t> = MANUAL</a:t>
             </a:r>
           </a:p>
           <a:p>
@@ -6979,7 +7193,17 @@
                 </a:solidFill>
                 <a:latin typeface="맑은 고딕"/>
               </a:rPr>
-              <a:t>•  ② `ALTER DATABASE CREATE DATAFILE '&lt;UNNAMED&gt;' AS NEW`</a:t>
+              <a:t>•  ② </a:t>
+            </a:r>
+            <a:r>
+              <a:rPr sz="1700" b="0">
+                <a:solidFill>
+                  <a:srgbClr val="222222"/>
+                </a:solidFill>
+                <a:latin typeface="Consolas"/>
+                <a:cs typeface="Consolas"/>
+              </a:rPr>
+              <a:t>ALTER DATABASE CREATE DATAFILE '&lt;UNNAMED&gt;' AS NEW</a:t>
             </a:r>
           </a:p>
           <a:p>
@@ -7190,7 +7414,35 @@
                 </a:solidFill>
                 <a:latin typeface="맑은 고딕"/>
               </a:rPr>
-              <a:t>•  실측 결과 : `o1_mf_dg_ts2_o8z81hpl_.dbf`, **10MB**</a:t>
+              <a:t>•  실측 결과 : </a:t>
+            </a:r>
+            <a:r>
+              <a:rPr sz="1700" b="0">
+                <a:solidFill>
+                  <a:srgbClr val="222222"/>
+                </a:solidFill>
+                <a:latin typeface="Consolas"/>
+                <a:cs typeface="Consolas"/>
+              </a:rPr>
+              <a:t>o1_mf_dg_ts2_o8z81hpl_.dbf</a:t>
+            </a:r>
+            <a:r>
+              <a:rPr sz="1700" b="0">
+                <a:solidFill>
+                  <a:srgbClr val="222222"/>
+                </a:solidFill>
+                <a:latin typeface="맑은 고딕"/>
+              </a:rPr>
+              <a:t>, </a:t>
+            </a:r>
+            <a:r>
+              <a:rPr sz="1700" b="1">
+                <a:solidFill>
+                  <a:srgbClr val="222222"/>
+                </a:solidFill>
+                <a:latin typeface="맑은 고딕"/>
+              </a:rPr>
+              <a:t>10MB</a:t>
             </a:r>
           </a:p>
           <a:p>
@@ -7206,7 +7458,26 @@
                 </a:solidFill>
                 <a:latin typeface="맑은 고딕"/>
               </a:rPr>
-              <a:t>•  테이블스페이스 이름 `dg_ts2`가 이름에 들어갔다</a:t>
+              <a:t>•  테이블스페이스 이름 </a:t>
+            </a:r>
+            <a:r>
+              <a:rPr sz="1700" b="0">
+                <a:solidFill>
+                  <a:srgbClr val="222222"/>
+                </a:solidFill>
+                <a:latin typeface="Consolas"/>
+                <a:cs typeface="Consolas"/>
+              </a:rPr>
+              <a:t>dg_ts2</a:t>
+            </a:r>
+            <a:r>
+              <a:rPr sz="1700" b="0">
+                <a:solidFill>
+                  <a:srgbClr val="222222"/>
+                </a:solidFill>
+                <a:latin typeface="맑은 고딕"/>
+              </a:rPr>
+              <a:t>가 이름에 들어갔다</a:t>
             </a:r>
           </a:p>
           <a:p>
@@ -7417,7 +7688,26 @@
                 </a:solidFill>
                 <a:latin typeface="맑은 고딕"/>
               </a:rPr>
-              <a:t>•  `AS NEW`로 만든 파일은 빈 껍데기</a:t>
+              <a:t>•  </a:t>
+            </a:r>
+            <a:r>
+              <a:rPr sz="1700" b="0">
+                <a:solidFill>
+                  <a:srgbClr val="222222"/>
+                </a:solidFill>
+                <a:latin typeface="Consolas"/>
+                <a:cs typeface="Consolas"/>
+              </a:rPr>
+              <a:t>AS NEW</a:t>
+            </a:r>
+            <a:r>
+              <a:rPr sz="1700" b="0">
+                <a:solidFill>
+                  <a:srgbClr val="222222"/>
+                </a:solidFill>
+                <a:latin typeface="맑은 고딕"/>
+              </a:rPr>
+              <a:t>로 만든 파일은 빈 껍데기</a:t>
             </a:r>
           </a:p>
           <a:p>
@@ -7465,7 +7755,16 @@
                 </a:solidFill>
                 <a:latin typeface="맑은 고딕"/>
               </a:rPr>
-              <a:t>•  Standby에서 **100행 그대로 조회됨**</a:t>
+              <a:t>•  Standby에서 </a:t>
+            </a:r>
+            <a:r>
+              <a:rPr sz="1700" b="1">
+                <a:solidFill>
+                  <a:srgbClr val="222222"/>
+                </a:solidFill>
+                <a:latin typeface="맑은 고딕"/>
+              </a:rPr>
+              <a:t>100행 그대로 조회됨</a:t>
             </a:r>
           </a:p>
         </p:txBody>
@@ -7860,7 +8159,26 @@
                 </a:solidFill>
                 <a:latin typeface="맑은 고딕"/>
               </a:rPr>
-              <a:t>•  `STANDBY_FILE_MANAGEMENT`가 자동화하는 범위와 하지 않는 범위를 구분한다.</a:t>
+              <a:t>•  </a:t>
+            </a:r>
+            <a:r>
+              <a:rPr sz="1600" b="0">
+                <a:solidFill>
+                  <a:srgbClr val="222222"/>
+                </a:solidFill>
+                <a:latin typeface="Consolas"/>
+                <a:cs typeface="Consolas"/>
+              </a:rPr>
+              <a:t>STANDBY_FILE_MANAGEMENT</a:t>
+            </a:r>
+            <a:r>
+              <a:rPr sz="1600" b="0">
+                <a:solidFill>
+                  <a:srgbClr val="222222"/>
+                </a:solidFill>
+                <a:latin typeface="맑은 고딕"/>
+              </a:rPr>
+              <a:t>가 자동화하는 범위와 하지 않는 범위를 구분한다.</a:t>
             </a:r>
           </a:p>
           <a:p>
@@ -7892,7 +8210,45 @@
                 </a:solidFill>
                 <a:latin typeface="맑은 고딕"/>
               </a:rPr>
-              <a:t>•  `MANUAL` 상태의 `UNNAMED` 파일과 ORA-1274·ORA-1111을 진단한다.</a:t>
+              <a:t>•  </a:t>
+            </a:r>
+            <a:r>
+              <a:rPr sz="1600" b="0">
+                <a:solidFill>
+                  <a:srgbClr val="222222"/>
+                </a:solidFill>
+                <a:latin typeface="Consolas"/>
+                <a:cs typeface="Consolas"/>
+              </a:rPr>
+              <a:t>MANUAL</a:t>
+            </a:r>
+            <a:r>
+              <a:rPr sz="1600" b="0">
+                <a:solidFill>
+                  <a:srgbClr val="222222"/>
+                </a:solidFill>
+                <a:latin typeface="맑은 고딕"/>
+              </a:rPr>
+              <a:t> 상태의 </a:t>
+            </a:r>
+            <a:r>
+              <a:rPr sz="1600" b="0">
+                <a:solidFill>
+                  <a:srgbClr val="222222"/>
+                </a:solidFill>
+                <a:latin typeface="Consolas"/>
+                <a:cs typeface="Consolas"/>
+              </a:rPr>
+              <a:t>UNNAMED</a:t>
+            </a:r>
+            <a:r>
+              <a:rPr sz="1600" b="0">
+                <a:solidFill>
+                  <a:srgbClr val="222222"/>
+                </a:solidFill>
+                <a:latin typeface="맑은 고딕"/>
+              </a:rPr>
+              <a:t> 파일과 ORA-1274·ORA-1111을 진단한다.</a:t>
             </a:r>
           </a:p>
           <a:p>
@@ -7908,7 +8264,26 @@
                 </a:solidFill>
                 <a:latin typeface="맑은 고딕"/>
               </a:rPr>
-              <a:t>•  `ALTER DATABASE CREATE DATAFILE ... AS NEW`로 복구한다.</a:t>
+              <a:t>•  </a:t>
+            </a:r>
+            <a:r>
+              <a:rPr sz="1600" b="0">
+                <a:solidFill>
+                  <a:srgbClr val="222222"/>
+                </a:solidFill>
+                <a:latin typeface="Consolas"/>
+                <a:cs typeface="Consolas"/>
+              </a:rPr>
+              <a:t>ALTER DATABASE CREATE DATAFILE ... AS NEW</a:t>
+            </a:r>
+            <a:r>
+              <a:rPr sz="1600" b="0">
+                <a:solidFill>
+                  <a:srgbClr val="222222"/>
+                </a:solidFill>
+                <a:latin typeface="맑은 고딕"/>
+              </a:rPr>
+              <a:t>로 복구한다.</a:t>
             </a:r>
           </a:p>
           <a:p>
@@ -8135,7 +8510,25 @@
                 </a:solidFill>
                 <a:latin typeface="맑은 고딕"/>
               </a:rPr>
-              <a:t>•  Standby에 PDB 등록, **GUID 동일**, 데이터 파일 3개</a:t>
+              <a:t>•  Standby에 PDB 등록, </a:t>
+            </a:r>
+            <a:r>
+              <a:rPr sz="1700" b="1">
+                <a:solidFill>
+                  <a:srgbClr val="222222"/>
+                </a:solidFill>
+                <a:latin typeface="맑은 고딕"/>
+              </a:rPr>
+              <a:t>GUID 동일</a:t>
+            </a:r>
+            <a:r>
+              <a:rPr sz="1700" b="0">
+                <a:solidFill>
+                  <a:srgbClr val="222222"/>
+                </a:solidFill>
+                <a:latin typeface="맑은 고딕"/>
+              </a:rPr>
+              <a:t>, 데이터 파일 3개</a:t>
             </a:r>
           </a:p>
           <a:p>
@@ -8151,7 +8544,45 @@
                 </a:solidFill>
                 <a:latin typeface="맑은 고딕"/>
               </a:rPr>
-              <a:t>•  `mkdir` 없이 `59FF1704.../datafile` 생성</a:t>
+              <a:t>•  </a:t>
+            </a:r>
+            <a:r>
+              <a:rPr sz="1700" b="0">
+                <a:solidFill>
+                  <a:srgbClr val="222222"/>
+                </a:solidFill>
+                <a:latin typeface="Consolas"/>
+                <a:cs typeface="Consolas"/>
+              </a:rPr>
+              <a:t>mkdir</a:t>
+            </a:r>
+            <a:r>
+              <a:rPr sz="1700" b="0">
+                <a:solidFill>
+                  <a:srgbClr val="222222"/>
+                </a:solidFill>
+                <a:latin typeface="맑은 고딕"/>
+              </a:rPr>
+              <a:t> 없이 </a:t>
+            </a:r>
+            <a:r>
+              <a:rPr sz="1700" b="0">
+                <a:solidFill>
+                  <a:srgbClr val="222222"/>
+                </a:solidFill>
+                <a:latin typeface="Consolas"/>
+                <a:cs typeface="Consolas"/>
+              </a:rPr>
+              <a:t>59FF1704.../datafile</a:t>
+            </a:r>
+            <a:r>
+              <a:rPr sz="1700" b="0">
+                <a:solidFill>
+                  <a:srgbClr val="222222"/>
+                </a:solidFill>
+                <a:latin typeface="맑은 고딕"/>
+              </a:rPr>
+              <a:t> 생성</a:t>
             </a:r>
           </a:p>
           <a:p>
@@ -8183,7 +8614,16 @@
                 </a:solidFill>
                 <a:latin typeface="맑은 고딕"/>
               </a:rPr>
-              <a:t>•  **PDB를 자주 추가하는 환경에서 OMF를 권하는 이유**</a:t>
+              <a:t>•  </a:t>
+            </a:r>
+            <a:r>
+              <a:rPr sz="1700" b="1">
+                <a:solidFill>
+                  <a:srgbClr val="222222"/>
+                </a:solidFill>
+                <a:latin typeface="맑은 고딕"/>
+              </a:rPr>
+              <a:t>PDB를 자주 추가하는 환경에서 OMF를 권하는 이유</a:t>
             </a:r>
           </a:p>
         </p:txBody>
@@ -8362,7 +8802,16 @@
                 </a:solidFill>
                 <a:latin typeface="맑은 고딕"/>
               </a:rPr>
-              <a:t>•  Standby에서 새 PDB의 OPEN_MODE는 **MOUNTED**</a:t>
+              <a:t>•  Standby에서 새 PDB의 OPEN_MODE는 </a:t>
+            </a:r>
+            <a:r>
+              <a:rPr sz="1700" b="1">
+                <a:solidFill>
+                  <a:srgbClr val="222222"/>
+                </a:solidFill>
+                <a:latin typeface="맑은 고딕"/>
+              </a:rPr>
+              <a:t>MOUNTED</a:t>
             </a:r>
           </a:p>
           <a:p>
@@ -8378,7 +8827,17 @@
                 </a:solidFill>
                 <a:latin typeface="맑은 고딕"/>
               </a:rPr>
-              <a:t>•  조회하면 `ORA-01219: ... queries allowed on fixed tables or views only`</a:t>
+              <a:t>•  조회하면 </a:t>
+            </a:r>
+            <a:r>
+              <a:rPr sz="1700" b="0">
+                <a:solidFill>
+                  <a:srgbClr val="222222"/>
+                </a:solidFill>
+                <a:latin typeface="Consolas"/>
+                <a:cs typeface="Consolas"/>
+              </a:rPr>
+              <a:t>ORA-01219: ... queries allowed on fixed tables or views only</a:t>
             </a:r>
           </a:p>
           <a:p>
@@ -8394,7 +8853,16 @@
                 </a:solidFill>
                 <a:latin typeface="맑은 고딕"/>
               </a:rPr>
-              <a:t>•  기존 PDB는 구축 때 열어 두었지만 **새 PDB는 아무도 열지 않는다**</a:t>
+              <a:t>•  기존 PDB는 구축 때 열어 두었지만 </a:t>
+            </a:r>
+            <a:r>
+              <a:rPr sz="1700" b="1">
+                <a:solidFill>
+                  <a:srgbClr val="222222"/>
+                </a:solidFill>
+                <a:latin typeface="맑은 고딕"/>
+              </a:rPr>
+              <a:t>새 PDB는 아무도 열지 않는다</a:t>
             </a:r>
           </a:p>
           <a:p>
@@ -8410,7 +8878,17 @@
                 </a:solidFill>
                 <a:latin typeface="맑은 고딕"/>
               </a:rPr>
-              <a:t>•  기동 스크립트에 `ALTER PLUGGABLE DATABASE ALL OPEN READ ONLY`</a:t>
+              <a:t>•  기동 스크립트에 </a:t>
+            </a:r>
+            <a:r>
+              <a:rPr sz="1700" b="0">
+                <a:solidFill>
+                  <a:srgbClr val="222222"/>
+                </a:solidFill>
+                <a:latin typeface="Consolas"/>
+                <a:cs typeface="Consolas"/>
+              </a:rPr>
+              <a:t>ALTER PLUGGABLE DATABASE ALL OPEN READ ONLY</a:t>
             </a:r>
           </a:p>
         </p:txBody>
@@ -8605,7 +9083,16 @@
                 </a:solidFill>
                 <a:latin typeface="맑은 고딕"/>
               </a:rPr>
-              <a:t>•  그런데 **빈 GUID 디렉터리는 남는다**</a:t>
+              <a:t>•  그런데 </a:t>
+            </a:r>
+            <a:r>
+              <a:rPr sz="1700" b="1">
+                <a:solidFill>
+                  <a:srgbClr val="222222"/>
+                </a:solidFill>
+                <a:latin typeface="맑은 고딕"/>
+              </a:rPr>
+              <a:t>빈 GUID 디렉터리는 남는다</a:t>
             </a:r>
           </a:p>
           <a:p>
@@ -8637,7 +9124,45 @@
                 </a:solidFill>
                 <a:latin typeface="맑은 고딕"/>
               </a:rPr>
-              <a:t>•  정리는 `V$PDBS.GUID`와 대조해 **`rmdir`**로</a:t>
+              <a:t>•  정리는 </a:t>
+            </a:r>
+            <a:r>
+              <a:rPr sz="1700" b="0">
+                <a:solidFill>
+                  <a:srgbClr val="222222"/>
+                </a:solidFill>
+                <a:latin typeface="Consolas"/>
+                <a:cs typeface="Consolas"/>
+              </a:rPr>
+              <a:t>V$PDBS.GUID</a:t>
+            </a:r>
+            <a:r>
+              <a:rPr sz="1700" b="0">
+                <a:solidFill>
+                  <a:srgbClr val="222222"/>
+                </a:solidFill>
+                <a:latin typeface="맑은 고딕"/>
+              </a:rPr>
+              <a:t>와 대조해 </a:t>
+            </a:r>
+            <a:r>
+              <a:rPr sz="1700" b="1">
+                <a:solidFill>
+                  <a:srgbClr val="222222"/>
+                </a:solidFill>
+                <a:latin typeface="Consolas"/>
+                <a:cs typeface="Consolas"/>
+              </a:rPr>
+              <a:t>rmdir</a:t>
+            </a:r>
+            <a:r>
+              <a:rPr sz="1700" b="0">
+                <a:solidFill>
+                  <a:srgbClr val="222222"/>
+                </a:solidFill>
+                <a:latin typeface="맑은 고딕"/>
+              </a:rPr>
+              <a:t>로</a:t>
             </a:r>
           </a:p>
         </p:txBody>
@@ -9087,7 +9612,16 @@
                 </a:solidFill>
                 <a:latin typeface="맑은 고딕"/>
               </a:rPr>
-              <a:t>•  45초 뒤 Standby : **세 그룹 그대로**</a:t>
+              <a:t>•  45초 뒤 Standby : </a:t>
+            </a:r>
+            <a:r>
+              <a:rPr sz="1700" b="1">
+                <a:solidFill>
+                  <a:srgbClr val="222222"/>
+                </a:solidFill>
+                <a:latin typeface="맑은 고딕"/>
+              </a:rPr>
+              <a:t>세 그룹 그대로</a:t>
             </a:r>
           </a:p>
           <a:p>
@@ -9330,7 +9864,16 @@
                 </a:solidFill>
                 <a:latin typeface="맑은 고딕"/>
               </a:rPr>
-              <a:t>•  **양쪽에 사람이 같이 적용해야 한다**</a:t>
+              <a:t>•  </a:t>
+            </a:r>
+            <a:r>
+              <a:rPr sz="1700" b="1">
+                <a:solidFill>
+                  <a:srgbClr val="222222"/>
+                </a:solidFill>
+                <a:latin typeface="맑은 고딕"/>
+              </a:rPr>
+              <a:t>양쪽에 사람이 같이 적용해야 한다</a:t>
             </a:r>
           </a:p>
           <a:p>
@@ -9525,7 +10068,45 @@
                 </a:solidFill>
                 <a:latin typeface="맑은 고딕"/>
               </a:rPr>
-              <a:t>•  `ORA-00301` + `ORA-27038` — 파일이 이미 있다</a:t>
+              <a:t>•  </a:t>
+            </a:r>
+            <a:r>
+              <a:rPr sz="1700" b="0">
+                <a:solidFill>
+                  <a:srgbClr val="222222"/>
+                </a:solidFill>
+                <a:latin typeface="Consolas"/>
+                <a:cs typeface="Consolas"/>
+              </a:rPr>
+              <a:t>ORA-00301</a:t>
+            </a:r>
+            <a:r>
+              <a:rPr sz="1700" b="0">
+                <a:solidFill>
+                  <a:srgbClr val="222222"/>
+                </a:solidFill>
+                <a:latin typeface="맑은 고딕"/>
+              </a:rPr>
+              <a:t> + </a:t>
+            </a:r>
+            <a:r>
+              <a:rPr sz="1700" b="0">
+                <a:solidFill>
+                  <a:srgbClr val="222222"/>
+                </a:solidFill>
+                <a:latin typeface="Consolas"/>
+                <a:cs typeface="Consolas"/>
+              </a:rPr>
+              <a:t>ORA-27038</a:t>
+            </a:r>
+            <a:r>
+              <a:rPr sz="1700" b="0">
+                <a:solidFill>
+                  <a:srgbClr val="222222"/>
+                </a:solidFill>
+                <a:latin typeface="맑은 고딕"/>
+              </a:rPr>
+              <a:t> — 파일이 이미 있다</a:t>
             </a:r>
           </a:p>
           <a:p>
@@ -9541,7 +10122,26 @@
                 </a:solidFill>
                 <a:latin typeface="맑은 고딕"/>
               </a:rPr>
-              <a:t>•  `ORA-00359` — 그룹이 없다</a:t>
+              <a:t>•  </a:t>
+            </a:r>
+            <a:r>
+              <a:rPr sz="1700" b="0">
+                <a:solidFill>
+                  <a:srgbClr val="222222"/>
+                </a:solidFill>
+                <a:latin typeface="Consolas"/>
+                <a:cs typeface="Consolas"/>
+              </a:rPr>
+              <a:t>ORA-00359</a:t>
+            </a:r>
+            <a:r>
+              <a:rPr sz="1700" b="0">
+                <a:solidFill>
+                  <a:srgbClr val="222222"/>
+                </a:solidFill>
+                <a:latin typeface="맑은 고딕"/>
+              </a:rPr>
+              <a:t> — 그룹이 없다</a:t>
             </a:r>
           </a:p>
           <a:p>
@@ -9557,7 +10157,26 @@
                 </a:solidFill>
                 <a:latin typeface="맑은 고딕"/>
               </a:rPr>
-              <a:t>•  `ORA-01623` — CURRENT 그룹은 지울 수 없다</a:t>
+              <a:t>•  </a:t>
+            </a:r>
+            <a:r>
+              <a:rPr sz="1700" b="0">
+                <a:solidFill>
+                  <a:srgbClr val="222222"/>
+                </a:solidFill>
+                <a:latin typeface="Consolas"/>
+                <a:cs typeface="Consolas"/>
+              </a:rPr>
+              <a:t>ORA-01623</a:t>
+            </a:r>
+            <a:r>
+              <a:rPr sz="1700" b="0">
+                <a:solidFill>
+                  <a:srgbClr val="222222"/>
+                </a:solidFill>
+                <a:latin typeface="맑은 고딕"/>
+              </a:rPr>
+              <a:t> — CURRENT 그룹은 지울 수 없다</a:t>
             </a:r>
           </a:p>
           <a:p>
@@ -9573,7 +10192,26 @@
                 </a:solidFill>
                 <a:latin typeface="맑은 고딕"/>
               </a:rPr>
-              <a:t>•  `ORA-00904` — V$LOG에 TYPE 열이 없다</a:t>
+              <a:t>•  </a:t>
+            </a:r>
+            <a:r>
+              <a:rPr sz="1700" b="0">
+                <a:solidFill>
+                  <a:srgbClr val="222222"/>
+                </a:solidFill>
+                <a:latin typeface="Consolas"/>
+                <a:cs typeface="Consolas"/>
+              </a:rPr>
+              <a:t>ORA-00904</a:t>
+            </a:r>
+            <a:r>
+              <a:rPr sz="1700" b="0">
+                <a:solidFill>
+                  <a:srgbClr val="222222"/>
+                </a:solidFill>
+                <a:latin typeface="맑은 고딕"/>
+              </a:rPr>
+              <a:t> — V$LOG에 TYPE 열이 없다</a:t>
             </a:r>
           </a:p>
         </p:txBody>
@@ -10007,7 +10645,26 @@
                 </a:solidFill>
                 <a:latin typeface="맑은 고딕"/>
               </a:rPr>
-              <a:t>•  `ORA-01623`으로 그룹 삭제가 거부됐다</a:t>
+              <a:t>•  </a:t>
+            </a:r>
+            <a:r>
+              <a:rPr sz="1700" b="0">
+                <a:solidFill>
+                  <a:srgbClr val="222222"/>
+                </a:solidFill>
+                <a:latin typeface="Consolas"/>
+                <a:cs typeface="Consolas"/>
+              </a:rPr>
+              <a:t>ORA-01623</a:t>
+            </a:r>
+            <a:r>
+              <a:rPr sz="1700" b="0">
+                <a:solidFill>
+                  <a:srgbClr val="222222"/>
+                </a:solidFill>
+                <a:latin typeface="맑은 고딕"/>
+              </a:rPr>
+              <a:t>으로 그룹 삭제가 거부됐다</a:t>
             </a:r>
           </a:p>
           <a:p>
@@ -10023,7 +10680,26 @@
                 </a:solidFill>
                 <a:latin typeface="맑은 고딕"/>
               </a:rPr>
-              <a:t>•  그 직후 `rm -f`로 CURRENT 리두 파일을 지웠다</a:t>
+              <a:t>•  그 직후 </a:t>
+            </a:r>
+            <a:r>
+              <a:rPr sz="1700" b="0">
+                <a:solidFill>
+                  <a:srgbClr val="222222"/>
+                </a:solidFill>
+                <a:latin typeface="Consolas"/>
+                <a:cs typeface="Consolas"/>
+              </a:rPr>
+              <a:t>rm -f</a:t>
+            </a:r>
+            <a:r>
+              <a:rPr sz="1700" b="0">
+                <a:solidFill>
+                  <a:srgbClr val="222222"/>
+                </a:solidFill>
+                <a:latin typeface="맑은 고딕"/>
+              </a:rPr>
+              <a:t>로 CURRENT 리두 파일을 지웠다</a:t>
             </a:r>
           </a:p>
           <a:p>
@@ -10039,7 +10715,16 @@
                 </a:solidFill>
                 <a:latin typeface="맑은 고딕"/>
               </a:rPr>
-              <a:t>•  **직후에는 아무 일도 일어나지 않았다**</a:t>
+              <a:t>•  </a:t>
+            </a:r>
+            <a:r>
+              <a:rPr sz="1700" b="1">
+                <a:solidFill>
+                  <a:srgbClr val="222222"/>
+                </a:solidFill>
+                <a:latin typeface="맑은 고딕"/>
+              </a:rPr>
+              <a:t>직후에는 아무 일도 일어나지 않았다</a:t>
             </a:r>
           </a:p>
           <a:p>
@@ -10234,7 +10919,26 @@
                 </a:solidFill>
                 <a:latin typeface="맑은 고딕"/>
               </a:rPr>
-              <a:t>•  `ORA-27041: unable to open file` (Linux Error 2)</a:t>
+              <a:t>•  </a:t>
+            </a:r>
+            <a:r>
+              <a:rPr sz="1700" b="0">
+                <a:solidFill>
+                  <a:srgbClr val="222222"/>
+                </a:solidFill>
+                <a:latin typeface="Consolas"/>
+                <a:cs typeface="Consolas"/>
+              </a:rPr>
+              <a:t>ORA-27041: unable to open file</a:t>
+            </a:r>
+            <a:r>
+              <a:rPr sz="1700" b="0">
+                <a:solidFill>
+                  <a:srgbClr val="222222"/>
+                </a:solidFill>
+                <a:latin typeface="맑은 고딕"/>
+              </a:rPr>
+              <a:t> (Linux Error 2)</a:t>
             </a:r>
           </a:p>
           <a:p>
@@ -10250,7 +10954,17 @@
                 </a:solidFill>
                 <a:latin typeface="맑은 고딕"/>
               </a:rPr>
-              <a:t>•  `ORA-00313: open failed for members of log group 8`</a:t>
+              <a:t>•  </a:t>
+            </a:r>
+            <a:r>
+              <a:rPr sz="1700" b="0">
+                <a:solidFill>
+                  <a:srgbClr val="222222"/>
+                </a:solidFill>
+                <a:latin typeface="Consolas"/>
+                <a:cs typeface="Consolas"/>
+              </a:rPr>
+              <a:t>ORA-00313: open failed for members of log group 8</a:t>
             </a:r>
           </a:p>
           <a:p>
@@ -10282,7 +10996,35 @@
                 </a:solidFill>
                 <a:latin typeface="맑은 고딕"/>
               </a:rPr>
-              <a:t>•  **PMON이 인스턴스를 종료** → 세션에는 `ORA-03113`</a:t>
+              <a:t>•  </a:t>
+            </a:r>
+            <a:r>
+              <a:rPr sz="1700" b="1">
+                <a:solidFill>
+                  <a:srgbClr val="222222"/>
+                </a:solidFill>
+                <a:latin typeface="맑은 고딕"/>
+              </a:rPr>
+              <a:t>PMON이 인스턴스를 종료</a:t>
+            </a:r>
+            <a:r>
+              <a:rPr sz="1700" b="0">
+                <a:solidFill>
+                  <a:srgbClr val="222222"/>
+                </a:solidFill>
+                <a:latin typeface="맑은 고딕"/>
+              </a:rPr>
+              <a:t> → 세션에는 </a:t>
+            </a:r>
+            <a:r>
+              <a:rPr sz="1700" b="0">
+                <a:solidFill>
+                  <a:srgbClr val="222222"/>
+                </a:solidFill>
+                <a:latin typeface="Consolas"/>
+                <a:cs typeface="Consolas"/>
+              </a:rPr>
+              <a:t>ORA-03113</a:t>
             </a:r>
           </a:p>
         </p:txBody>
@@ -10713,7 +11455,45 @@
                 </a:solidFill>
                 <a:latin typeface="맑은 고딕"/>
               </a:rPr>
-              <a:t>•  `CLEAR UNARCHIVED LOGFILE` → `ORA-01624` (크래시 복구에 필요)</a:t>
+              <a:t>•  </a:t>
+            </a:r>
+            <a:r>
+              <a:rPr sz="1700" b="0">
+                <a:solidFill>
+                  <a:srgbClr val="222222"/>
+                </a:solidFill>
+                <a:latin typeface="Consolas"/>
+                <a:cs typeface="Consolas"/>
+              </a:rPr>
+              <a:t>CLEAR UNARCHIVED LOGFILE</a:t>
+            </a:r>
+            <a:r>
+              <a:rPr sz="1700" b="0">
+                <a:solidFill>
+                  <a:srgbClr val="222222"/>
+                </a:solidFill>
+                <a:latin typeface="맑은 고딕"/>
+              </a:rPr>
+              <a:t> → </a:t>
+            </a:r>
+            <a:r>
+              <a:rPr sz="1700" b="0">
+                <a:solidFill>
+                  <a:srgbClr val="222222"/>
+                </a:solidFill>
+                <a:latin typeface="Consolas"/>
+                <a:cs typeface="Consolas"/>
+              </a:rPr>
+              <a:t>ORA-01624</a:t>
+            </a:r>
+            <a:r>
+              <a:rPr sz="1700" b="0">
+                <a:solidFill>
+                  <a:srgbClr val="222222"/>
+                </a:solidFill>
+                <a:latin typeface="맑은 고딕"/>
+              </a:rPr>
+              <a:t> (크래시 복구에 필요)</a:t>
             </a:r>
           </a:p>
           <a:p>
@@ -10729,7 +11509,16 @@
                 </a:solidFill>
                 <a:latin typeface="맑은 고딕"/>
               </a:rPr>
-              <a:t>•  Standby의 SRL을 가져와 적용 → 필요 SCN **2513532 → 2513652 전진**</a:t>
+              <a:t>•  Standby의 SRL을 가져와 적용 → 필요 SCN </a:t>
+            </a:r>
+            <a:r>
+              <a:rPr sz="1700" b="1">
+                <a:solidFill>
+                  <a:srgbClr val="222222"/>
+                </a:solidFill>
+                <a:latin typeface="맑은 고딕"/>
+              </a:rPr>
+              <a:t>2513532 → 2513652 전진</a:t>
             </a:r>
           </a:p>
           <a:p>
@@ -10761,7 +11550,25 @@
                 </a:solidFill>
                 <a:latin typeface="맑은 고딕"/>
               </a:rPr>
-              <a:t>•  **MAXIMUM PERFORMANCE = ASYNC** — 보내지 못한 리두 꼬리가 있었다</a:t>
+              <a:t>•  </a:t>
+            </a:r>
+            <a:r>
+              <a:rPr sz="1700" b="1">
+                <a:solidFill>
+                  <a:srgbClr val="222222"/>
+                </a:solidFill>
+                <a:latin typeface="맑은 고딕"/>
+              </a:rPr>
+              <a:t>MAXIMUM PERFORMANCE = ASYNC</a:t>
+            </a:r>
+            <a:r>
+              <a:rPr sz="1700" b="0">
+                <a:solidFill>
+                  <a:srgbClr val="222222"/>
+                </a:solidFill>
+                <a:latin typeface="맑은 고딕"/>
+              </a:rPr>
+              <a:t> — 보내지 못한 리두 꼬리가 있었다</a:t>
             </a:r>
           </a:p>
         </p:txBody>
@@ -10940,7 +11747,25 @@
                 </a:solidFill>
                 <a:latin typeface="맑은 고딕"/>
               </a:rPr>
-              <a:t>•  **① DB에서 먼저 제거** — 실패하면 원인을 해결한다. 우회하지 않는다</a:t>
+              <a:t>•  </a:t>
+            </a:r>
+            <a:r>
+              <a:rPr sz="1700" b="1">
+                <a:solidFill>
+                  <a:srgbClr val="222222"/>
+                </a:solidFill>
+                <a:latin typeface="맑은 고딕"/>
+              </a:rPr>
+              <a:t>① DB에서 먼저 제거</a:t>
+            </a:r>
+            <a:r>
+              <a:rPr sz="1700" b="0">
+                <a:solidFill>
+                  <a:srgbClr val="222222"/>
+                </a:solidFill>
+                <a:latin typeface="맑은 고딕"/>
+              </a:rPr>
+              <a:t> — 실패하면 원인을 해결한다. 우회하지 않는다</a:t>
             </a:r>
           </a:p>
           <a:p>
@@ -10956,7 +11781,44 @@
                 </a:solidFill>
                 <a:latin typeface="맑은 고딕"/>
               </a:rPr>
-              <a:t>•  **② 조회로 확인** — `no rows selected`를 눈으로 본다</a:t>
+              <a:t>•  </a:t>
+            </a:r>
+            <a:r>
+              <a:rPr sz="1700" b="1">
+                <a:solidFill>
+                  <a:srgbClr val="222222"/>
+                </a:solidFill>
+                <a:latin typeface="맑은 고딕"/>
+              </a:rPr>
+              <a:t>② 조회로 확인</a:t>
+            </a:r>
+            <a:r>
+              <a:rPr sz="1700" b="0">
+                <a:solidFill>
+                  <a:srgbClr val="222222"/>
+                </a:solidFill>
+                <a:latin typeface="맑은 고딕"/>
+              </a:rPr>
+              <a:t> — </a:t>
+            </a:r>
+            <a:r>
+              <a:rPr sz="1700" b="0">
+                <a:solidFill>
+                  <a:srgbClr val="222222"/>
+                </a:solidFill>
+                <a:latin typeface="Consolas"/>
+                <a:cs typeface="Consolas"/>
+              </a:rPr>
+              <a:t>no rows selected</a:t>
+            </a:r>
+            <a:r>
+              <a:rPr sz="1700" b="0">
+                <a:solidFill>
+                  <a:srgbClr val="222222"/>
+                </a:solidFill>
+                <a:latin typeface="맑은 고딕"/>
+              </a:rPr>
+              <a:t>를 눈으로 본다</a:t>
             </a:r>
           </a:p>
           <a:p>
@@ -10972,7 +11834,44 @@
                 </a:solidFill>
                 <a:latin typeface="맑은 고딕"/>
               </a:rPr>
-              <a:t>•  **③ 파일은 `mv`로 정리** — 며칠 뒤 지운다</a:t>
+              <a:t>•  </a:t>
+            </a:r>
+            <a:r>
+              <a:rPr sz="1700" b="1">
+                <a:solidFill>
+                  <a:srgbClr val="222222"/>
+                </a:solidFill>
+                <a:latin typeface="맑은 고딕"/>
+              </a:rPr>
+              <a:t>③ 파일은 </a:t>
+            </a:r>
+            <a:r>
+              <a:rPr sz="1700" b="1">
+                <a:solidFill>
+                  <a:srgbClr val="222222"/>
+                </a:solidFill>
+                <a:latin typeface="Consolas"/>
+                <a:cs typeface="Consolas"/>
+              </a:rPr>
+              <a:t>mv</a:t>
+            </a:r>
+            <a:r>
+              <a:rPr sz="1700" b="1">
+                <a:solidFill>
+                  <a:srgbClr val="222222"/>
+                </a:solidFill>
+                <a:latin typeface="맑은 고딕"/>
+              </a:rPr>
+              <a:t>로 정리</a:t>
+            </a:r>
+            <a:r>
+              <a:rPr sz="1700" b="0">
+                <a:solidFill>
+                  <a:srgbClr val="222222"/>
+                </a:solidFill>
+                <a:latin typeface="맑은 고딕"/>
+              </a:rPr>
+              <a:t> — 며칠 뒤 지운다</a:t>
             </a:r>
           </a:p>
           <a:p>
@@ -10988,7 +11887,26 @@
                 </a:solidFill>
                 <a:latin typeface="맑은 고딕"/>
               </a:rPr>
-              <a:t>•  실습 05의 `rmdir`도 같은 원칙</a:t>
+              <a:t>•  실습 05의 </a:t>
+            </a:r>
+            <a:r>
+              <a:rPr sz="1700" b="0">
+                <a:solidFill>
+                  <a:srgbClr val="222222"/>
+                </a:solidFill>
+                <a:latin typeface="Consolas"/>
+                <a:cs typeface="Consolas"/>
+              </a:rPr>
+              <a:t>rmdir</a:t>
+            </a:r>
+            <a:r>
+              <a:rPr sz="1700" b="0">
+                <a:solidFill>
+                  <a:srgbClr val="222222"/>
+                </a:solidFill>
+                <a:latin typeface="맑은 고딕"/>
+              </a:rPr>
+              <a:t>도 같은 원칙</a:t>
             </a:r>
           </a:p>
         </p:txBody>
@@ -11215,7 +12133,26 @@
                 </a:solidFill>
                 <a:latin typeface="맑은 고딕"/>
               </a:rPr>
-              <a:t>•  조건 : Standby의 `STANDBY_FILE_MANAGEMENT` = AUTO</a:t>
+              <a:t>•  조건 : Standby의 </a:t>
+            </a:r>
+            <a:r>
+              <a:rPr sz="1700" b="0">
+                <a:solidFill>
+                  <a:srgbClr val="222222"/>
+                </a:solidFill>
+                <a:latin typeface="Consolas"/>
+                <a:cs typeface="Consolas"/>
+              </a:rPr>
+              <a:t>STANDBY_FILE_MANAGEMENT</a:t>
+            </a:r>
+            <a:r>
+              <a:rPr sz="1700" b="0">
+                <a:solidFill>
+                  <a:srgbClr val="222222"/>
+                </a:solidFill>
+                <a:latin typeface="맑은 고딕"/>
+              </a:rPr>
+              <a:t> = AUTO</a:t>
             </a:r>
           </a:p>
         </p:txBody>
@@ -11394,7 +12331,25 @@
                 </a:solidFill>
                 <a:latin typeface="맑은 고딕"/>
               </a:rPr>
-              <a:t>•  확인은 **Standby에서** 한다 — 파라미터도 상태도</a:t>
+              <a:t>•  확인은 </a:t>
+            </a:r>
+            <a:r>
+              <a:rPr sz="1700" b="1">
+                <a:solidFill>
+                  <a:srgbClr val="222222"/>
+                </a:solidFill>
+                <a:latin typeface="맑은 고딕"/>
+              </a:rPr>
+              <a:t>Standby에서</a:t>
+            </a:r>
+            <a:r>
+              <a:rPr sz="1700" b="0">
+                <a:solidFill>
+                  <a:srgbClr val="222222"/>
+                </a:solidFill>
+                <a:latin typeface="맑은 고딕"/>
+              </a:rPr>
+              <a:t> 한다 — 파라미터도 상태도</a:t>
             </a:r>
           </a:p>
           <a:p>
@@ -11410,7 +12365,25 @@
                 </a:solidFill>
                 <a:latin typeface="맑은 고딕"/>
               </a:rPr>
-              <a:t>•  오류를 **우회하지 않는다** — 오류는 위험 신호다</a:t>
+              <a:t>•  오류를 </a:t>
+            </a:r>
+            <a:r>
+              <a:rPr sz="1700" b="1">
+                <a:solidFill>
+                  <a:srgbClr val="222222"/>
+                </a:solidFill>
+                <a:latin typeface="맑은 고딕"/>
+              </a:rPr>
+              <a:t>우회하지 않는다</a:t>
+            </a:r>
+            <a:r>
+              <a:rPr sz="1700" b="0">
+                <a:solidFill>
+                  <a:srgbClr val="222222"/>
+                </a:solidFill>
+                <a:latin typeface="맑은 고딕"/>
+              </a:rPr>
+              <a:t> — 오류는 위험 신호다</a:t>
             </a:r>
           </a:p>
           <a:p>
@@ -11426,7 +12399,54 @@
                 </a:solidFill>
                 <a:latin typeface="맑은 고딕"/>
               </a:rPr>
-              <a:t>•  지울 때는 **되돌릴 수 있게** — `mv`와 `rmdir`</a:t>
+              <a:t>•  지울 때는 </a:t>
+            </a:r>
+            <a:r>
+              <a:rPr sz="1700" b="1">
+                <a:solidFill>
+                  <a:srgbClr val="222222"/>
+                </a:solidFill>
+                <a:latin typeface="맑은 고딕"/>
+              </a:rPr>
+              <a:t>되돌릴 수 있게</a:t>
+            </a:r>
+            <a:r>
+              <a:rPr sz="1700" b="0">
+                <a:solidFill>
+                  <a:srgbClr val="222222"/>
+                </a:solidFill>
+                <a:latin typeface="맑은 고딕"/>
+              </a:rPr>
+              <a:t> — </a:t>
+            </a:r>
+            <a:r>
+              <a:rPr sz="1700" b="0">
+                <a:solidFill>
+                  <a:srgbClr val="222222"/>
+                </a:solidFill>
+                <a:latin typeface="Consolas"/>
+                <a:cs typeface="Consolas"/>
+              </a:rPr>
+              <a:t>mv</a:t>
+            </a:r>
+            <a:r>
+              <a:rPr sz="1700" b="0">
+                <a:solidFill>
+                  <a:srgbClr val="222222"/>
+                </a:solidFill>
+                <a:latin typeface="맑은 고딕"/>
+              </a:rPr>
+              <a:t>와 </a:t>
+            </a:r>
+            <a:r>
+              <a:rPr sz="1700" b="0">
+                <a:solidFill>
+                  <a:srgbClr val="222222"/>
+                </a:solidFill>
+                <a:latin typeface="Consolas"/>
+                <a:cs typeface="Consolas"/>
+              </a:rPr>
+              <a:t>rmdir</a:t>
             </a:r>
           </a:p>
         </p:txBody>
@@ -11566,7 +12586,26 @@
                 </a:solidFill>
                 <a:latin typeface="맑은 고딕"/>
               </a:rPr>
-              <a:t>•  Q1. `STANDBY_FILE_MANAGEMENT`를 확인할 때 어느 쪽에서 조회해야 하며 그 이유는?</a:t>
+              <a:t>•  Q1. </a:t>
+            </a:r>
+            <a:r>
+              <a:rPr sz="1600" b="0">
+                <a:solidFill>
+                  <a:srgbClr val="222222"/>
+                </a:solidFill>
+                <a:latin typeface="Consolas"/>
+                <a:cs typeface="Consolas"/>
+              </a:rPr>
+              <a:t>STANDBY_FILE_MANAGEMENT</a:t>
+            </a:r>
+            <a:r>
+              <a:rPr sz="1600" b="0">
+                <a:solidFill>
+                  <a:srgbClr val="222222"/>
+                </a:solidFill>
+                <a:latin typeface="맑은 고딕"/>
+              </a:rPr>
+              <a:t>를 확인할 때 어느 쪽에서 조회해야 하며 그 이유는?</a:t>
             </a:r>
           </a:p>
           <a:p>
@@ -11598,7 +12637,26 @@
                 </a:solidFill>
                 <a:latin typeface="맑은 고딕"/>
               </a:rPr>
-              <a:t>•  Q3. `UNNAMED00016`이 만들어지는 조건과 ORA-1274가 ORA-1111로 바뀌는 것의 의미는?</a:t>
+              <a:t>•  Q3. </a:t>
+            </a:r>
+            <a:r>
+              <a:rPr sz="1600" b="0">
+                <a:solidFill>
+                  <a:srgbClr val="222222"/>
+                </a:solidFill>
+                <a:latin typeface="Consolas"/>
+                <a:cs typeface="Consolas"/>
+              </a:rPr>
+              <a:t>UNNAMED00016</a:t>
+            </a:r>
+            <a:r>
+              <a:rPr sz="1600" b="0">
+                <a:solidFill>
+                  <a:srgbClr val="222222"/>
+                </a:solidFill>
+                <a:latin typeface="맑은 고딕"/>
+              </a:rPr>
+              <a:t>이 만들어지는 조건과 ORA-1274가 ORA-1111로 바뀌는 것의 의미는?</a:t>
             </a:r>
           </a:p>
           <a:p>
@@ -11614,7 +12672,26 @@
                 </a:solidFill>
                 <a:latin typeface="맑은 고딕"/>
               </a:rPr>
-              <a:t>•  Q4. `AS NEW`가 올바른 이름과 크기의 파일을 만들 수 있는 근거는?</a:t>
+              <a:t>•  Q4. </a:t>
+            </a:r>
+            <a:r>
+              <a:rPr sz="1600" b="0">
+                <a:solidFill>
+                  <a:srgbClr val="222222"/>
+                </a:solidFill>
+                <a:latin typeface="Consolas"/>
+                <a:cs typeface="Consolas"/>
+              </a:rPr>
+              <a:t>AS NEW</a:t>
+            </a:r>
+            <a:r>
+              <a:rPr sz="1600" b="0">
+                <a:solidFill>
+                  <a:srgbClr val="222222"/>
+                </a:solidFill>
+                <a:latin typeface="맑은 고딕"/>
+              </a:rPr>
+              <a:t>가 올바른 이름과 크기의 파일을 만들 수 있는 근거는?</a:t>
             </a:r>
           </a:p>
           <a:p>
@@ -11786,7 +12863,26 @@
                 </a:solidFill>
                 <a:latin typeface="맑은 고딕"/>
               </a:rPr>
-              <a:t>•  `STANDBY_FILE_MANAGEMENT`는 Standby 쪽 값이 동작을 결정한다. Primary에서 확인하고 안심하면 안 된다.</a:t>
+              <a:t>•  </a:t>
+            </a:r>
+            <a:r>
+              <a:rPr sz="1600" b="0">
+                <a:solidFill>
+                  <a:srgbClr val="222222"/>
+                </a:solidFill>
+                <a:latin typeface="Consolas"/>
+                <a:cs typeface="Consolas"/>
+              </a:rPr>
+              <a:t>STANDBY_FILE_MANAGEMENT</a:t>
+            </a:r>
+            <a:r>
+              <a:rPr sz="1600" b="0">
+                <a:solidFill>
+                  <a:srgbClr val="222222"/>
+                </a:solidFill>
+                <a:latin typeface="맑은 고딕"/>
+              </a:rPr>
+              <a:t>는 Standby 쪽 값이 동작을 결정한다. Primary에서 확인하고 안심하면 안 된다.</a:t>
             </a:r>
           </a:p>
           <a:p>
@@ -11818,7 +12914,45 @@
                 </a:solidFill>
                 <a:latin typeface="맑은 고딕"/>
               </a:rPr>
-              <a:t>•  비대칭 구성에서 이름은 각자 규칙을 따른다. Primary `dg_ts1_01.dbf` / Standby `o1_mf_dg_ts1_o8z7v7lh_.dbf`.</a:t>
+              <a:t>•  비대칭 구성에서 이름은 각자 규칙을 따른다. Primary </a:t>
+            </a:r>
+            <a:r>
+              <a:rPr sz="1600" b="0">
+                <a:solidFill>
+                  <a:srgbClr val="222222"/>
+                </a:solidFill>
+                <a:latin typeface="Consolas"/>
+                <a:cs typeface="Consolas"/>
+              </a:rPr>
+              <a:t>dg_ts1_01.dbf</a:t>
+            </a:r>
+            <a:r>
+              <a:rPr sz="1600" b="0">
+                <a:solidFill>
+                  <a:srgbClr val="222222"/>
+                </a:solidFill>
+                <a:latin typeface="맑은 고딕"/>
+              </a:rPr>
+              <a:t> / Standby </a:t>
+            </a:r>
+            <a:r>
+              <a:rPr sz="1600" b="0">
+                <a:solidFill>
+                  <a:srgbClr val="222222"/>
+                </a:solidFill>
+                <a:latin typeface="Consolas"/>
+                <a:cs typeface="Consolas"/>
+              </a:rPr>
+              <a:t>o1_mf_dg_ts1_o8z7v7lh_.dbf</a:t>
+            </a:r>
+            <a:r>
+              <a:rPr sz="1600" b="0">
+                <a:solidFill>
+                  <a:srgbClr val="222222"/>
+                </a:solidFill>
+                <a:latin typeface="맑은 고딕"/>
+              </a:rPr>
+              <a:t>.</a:t>
             </a:r>
           </a:p>
           <a:p>
@@ -11866,7 +13000,44 @@
                 </a:solidFill>
                 <a:latin typeface="맑은 고딕"/>
               </a:rPr>
-              <a:t>•  MANUAL이면 `$ORACLE_HOME/dbs/UNNAMED00016`(0바이트)이 만들어지고 MRP가 죽는다. 오류는 **ORA-1274**.</a:t>
+              <a:t>•  MANUAL이면 </a:t>
+            </a:r>
+            <a:r>
+              <a:rPr sz="1600" b="0">
+                <a:solidFill>
+                  <a:srgbClr val="222222"/>
+                </a:solidFill>
+                <a:latin typeface="Consolas"/>
+                <a:cs typeface="Consolas"/>
+              </a:rPr>
+              <a:t>$ORACLE_HOME/dbs/UNNAMED00016</a:t>
+            </a:r>
+            <a:r>
+              <a:rPr sz="1600" b="0">
+                <a:solidFill>
+                  <a:srgbClr val="222222"/>
+                </a:solidFill>
+                <a:latin typeface="맑은 고딕"/>
+              </a:rPr>
+              <a:t>(0바이트)이 만들어지고 MRP가 죽는다. 오류는 </a:t>
+            </a:r>
+            <a:r>
+              <a:rPr sz="1600" b="1">
+                <a:solidFill>
+                  <a:srgbClr val="222222"/>
+                </a:solidFill>
+                <a:latin typeface="맑은 고딕"/>
+              </a:rPr>
+              <a:t>ORA-1274</a:t>
+            </a:r>
+            <a:r>
+              <a:rPr sz="1600" b="0">
+                <a:solidFill>
+                  <a:srgbClr val="222222"/>
+                </a:solidFill>
+                <a:latin typeface="맑은 고딕"/>
+              </a:rPr>
+              <a:t>.</a:t>
             </a:r>
           </a:p>
           <a:p>
@@ -11898,7 +13069,25 @@
                 </a:solidFill>
                 <a:latin typeface="맑은 고딕"/>
               </a:rPr>
-              <a:t>•  AUTO로 되돌려도 저절로 고쳐지지 않는다. 오류가 **ORA-1111**로 바뀔 뿐이다.</a:t>
+              <a:t>•  AUTO로 되돌려도 저절로 고쳐지지 않는다. 오류가 </a:t>
+            </a:r>
+            <a:r>
+              <a:rPr sz="1600" b="1">
+                <a:solidFill>
+                  <a:srgbClr val="222222"/>
+                </a:solidFill>
+                <a:latin typeface="맑은 고딕"/>
+              </a:rPr>
+              <a:t>ORA-1111</a:t>
+            </a:r>
+            <a:r>
+              <a:rPr sz="1600" b="0">
+                <a:solidFill>
+                  <a:srgbClr val="222222"/>
+                </a:solidFill>
+                <a:latin typeface="맑은 고딕"/>
+              </a:rPr>
+              <a:t>로 바뀔 뿐이다.</a:t>
             </a:r>
           </a:p>
           <a:p>
@@ -11914,7 +13103,64 @@
                 </a:solidFill>
                 <a:latin typeface="맑은 고딕"/>
               </a:rPr>
-              <a:t>•  증거는 `V$DATAFILE.STATUS=RECOVER`와 `V$DATAFILE_HEADER.ERROR=FILE MISSING`. `V$RECOVER_FILE`은 비어 있다.</a:t>
+              <a:t>•  증거는 </a:t>
+            </a:r>
+            <a:r>
+              <a:rPr sz="1600" b="0">
+                <a:solidFill>
+                  <a:srgbClr val="222222"/>
+                </a:solidFill>
+                <a:latin typeface="Consolas"/>
+                <a:cs typeface="Consolas"/>
+              </a:rPr>
+              <a:t>V$DATAFILE.STATUS=RECOVER</a:t>
+            </a:r>
+            <a:r>
+              <a:rPr sz="1600" b="0">
+                <a:solidFill>
+                  <a:srgbClr val="222222"/>
+                </a:solidFill>
+                <a:latin typeface="맑은 고딕"/>
+              </a:rPr>
+              <a:t>와 </a:t>
+            </a:r>
+            <a:r>
+              <a:rPr sz="1600" b="0">
+                <a:solidFill>
+                  <a:srgbClr val="222222"/>
+                </a:solidFill>
+                <a:latin typeface="Consolas"/>
+                <a:cs typeface="Consolas"/>
+              </a:rPr>
+              <a:t>V$DATAFILE_HEADER.ERROR=FILE MISSING</a:t>
+            </a:r>
+            <a:r>
+              <a:rPr sz="1600" b="0">
+                <a:solidFill>
+                  <a:srgbClr val="222222"/>
+                </a:solidFill>
+                <a:latin typeface="맑은 고딕"/>
+              </a:rPr>
+              <a:t>. </a:t>
+            </a:r>
+            <a:r>
+              <a:rPr sz="1600" b="0">
+                <a:solidFill>
+                  <a:srgbClr val="222222"/>
+                </a:solidFill>
+                <a:latin typeface="Consolas"/>
+                <a:cs typeface="Consolas"/>
+              </a:rPr>
+              <a:t>V$RECOVER_FILE</a:t>
+            </a:r>
+            <a:r>
+              <a:rPr sz="1600" b="0">
+                <a:solidFill>
+                  <a:srgbClr val="222222"/>
+                </a:solidFill>
+                <a:latin typeface="맑은 고딕"/>
+              </a:rPr>
+              <a:t>은 비어 있다.</a:t>
             </a:r>
           </a:p>
           <a:p>
@@ -11930,7 +13176,26 @@
                 </a:solidFill>
                 <a:latin typeface="맑은 고딕"/>
               </a:rPr>
-              <a:t>•  복구는 MANUAL → `CREATE DATAFILE ... AS NEW` → AUTO → MRP 재기동 순서다.</a:t>
+              <a:t>•  복구는 MANUAL → </a:t>
+            </a:r>
+            <a:r>
+              <a:rPr sz="1600" b="0">
+                <a:solidFill>
+                  <a:srgbClr val="222222"/>
+                </a:solidFill>
+                <a:latin typeface="Consolas"/>
+                <a:cs typeface="Consolas"/>
+              </a:rPr>
+              <a:t>CREATE DATAFILE ... AS NEW</a:t>
+            </a:r>
+            <a:r>
+              <a:rPr sz="1600" b="0">
+                <a:solidFill>
+                  <a:srgbClr val="222222"/>
+                </a:solidFill>
+                <a:latin typeface="맑은 고딕"/>
+              </a:rPr>
+              <a:t> → AUTO → MRP 재기동 순서다.</a:t>
             </a:r>
           </a:p>
           <a:p>
@@ -11946,7 +13211,45 @@
                 </a:solidFill>
                 <a:latin typeface="맑은 고딕"/>
               </a:rPr>
-              <a:t>•  `AS NEW`는 리두에서 정보를 읽어 이름·크기를 맞춘다. 실측 `o1_mf_dg_ts2_o8z81hpl_.dbf` 10MB.</a:t>
+              <a:t>•  </a:t>
+            </a:r>
+            <a:r>
+              <a:rPr sz="1600" b="0">
+                <a:solidFill>
+                  <a:srgbClr val="222222"/>
+                </a:solidFill>
+                <a:latin typeface="Consolas"/>
+                <a:cs typeface="Consolas"/>
+              </a:rPr>
+              <a:t>AS NEW</a:t>
+            </a:r>
+            <a:r>
+              <a:rPr sz="1600" b="0">
+                <a:solidFill>
+                  <a:srgbClr val="222222"/>
+                </a:solidFill>
+                <a:latin typeface="맑은 고딕"/>
+              </a:rPr>
+              <a:t>는 리두에서 정보를 읽어 이름·크기를 맞춘다. 실측 </a:t>
+            </a:r>
+            <a:r>
+              <a:rPr sz="1600" b="0">
+                <a:solidFill>
+                  <a:srgbClr val="222222"/>
+                </a:solidFill>
+                <a:latin typeface="Consolas"/>
+                <a:cs typeface="Consolas"/>
+              </a:rPr>
+              <a:t>o1_mf_dg_ts2_o8z81hpl_.dbf</a:t>
+            </a:r>
+            <a:r>
+              <a:rPr sz="1600" b="0">
+                <a:solidFill>
+                  <a:srgbClr val="222222"/>
+                </a:solidFill>
+                <a:latin typeface="맑은 고딕"/>
+              </a:rPr>
+              <a:t> 10MB.</a:t>
             </a:r>
           </a:p>
           <a:p>
@@ -11994,7 +13297,25 @@
                 </a:solidFill>
                 <a:latin typeface="맑은 고딕"/>
               </a:rPr>
-              <a:t>•  새 PDB는 Standby에서 MOUNTED다. 열지 않으면 **ORA-01219**. 기동 스크립트에 ALL 옵션을 넣는다.</a:t>
+              <a:t>•  새 PDB는 Standby에서 MOUNTED다. 열지 않으면 </a:t>
+            </a:r>
+            <a:r>
+              <a:rPr sz="1600" b="1">
+                <a:solidFill>
+                  <a:srgbClr val="222222"/>
+                </a:solidFill>
+                <a:latin typeface="맑은 고딕"/>
+              </a:rPr>
+              <a:t>ORA-01219</a:t>
+            </a:r>
+            <a:r>
+              <a:rPr sz="1600" b="0">
+                <a:solidFill>
+                  <a:srgbClr val="222222"/>
+                </a:solidFill>
+                <a:latin typeface="맑은 고딕"/>
+              </a:rPr>
+              <a:t>. 기동 스크립트에 ALL 옵션을 넣는다.</a:t>
             </a:r>
           </a:p>
           <a:p>
@@ -12010,7 +13331,63 @@
                 </a:solidFill>
                 <a:latin typeface="맑은 고딕"/>
               </a:rPr>
-              <a:t>•  PDB를 지우면 파일은 사라지지만 **빈 GUID 디렉터리는 남는다.** `V$PDBS`와 대조해 `rmdir`로 정리한다.</a:t>
+              <a:t>•  PDB를 지우면 파일은 사라지지만 </a:t>
+            </a:r>
+            <a:r>
+              <a:rPr sz="1600" b="1">
+                <a:solidFill>
+                  <a:srgbClr val="222222"/>
+                </a:solidFill>
+                <a:latin typeface="맑은 고딕"/>
+              </a:rPr>
+              <a:t>빈 GUID 디렉터리는 남는다.</a:t>
+            </a:r>
+            <a:r>
+              <a:rPr sz="1600" b="0">
+                <a:solidFill>
+                  <a:srgbClr val="222222"/>
+                </a:solidFill>
+                <a:latin typeface="맑은 고딕"/>
+              </a:rPr>
+              <a:t> </a:t>
+            </a:r>
+            <a:r>
+              <a:rPr sz="1600" b="0">
+                <a:solidFill>
+                  <a:srgbClr val="222222"/>
+                </a:solidFill>
+                <a:latin typeface="Consolas"/>
+                <a:cs typeface="Consolas"/>
+              </a:rPr>
+              <a:t>V$PDBS</a:t>
+            </a:r>
+            <a:r>
+              <a:rPr sz="1600" b="0">
+                <a:solidFill>
+                  <a:srgbClr val="222222"/>
+                </a:solidFill>
+                <a:latin typeface="맑은 고딕"/>
+              </a:rPr>
+              <a:t>와 대조해 </a:t>
+            </a:r>
+            <a:r>
+              <a:rPr sz="1600" b="0">
+                <a:solidFill>
+                  <a:srgbClr val="222222"/>
+                </a:solidFill>
+                <a:latin typeface="Consolas"/>
+                <a:cs typeface="Consolas"/>
+              </a:rPr>
+              <a:t>rmdir</a:t>
+            </a:r>
+            <a:r>
+              <a:rPr sz="1600" b="0">
+                <a:solidFill>
+                  <a:srgbClr val="222222"/>
+                </a:solidFill>
+                <a:latin typeface="맑은 고딕"/>
+              </a:rPr>
+              <a:t>로 정리한다.</a:t>
             </a:r>
           </a:p>
           <a:p>
@@ -12026,7 +13403,25 @@
                 </a:solidFill>
                 <a:latin typeface="맑은 고딕"/>
               </a:rPr>
-              <a:t>•  **온라인 리두 로그 그룹 추가는 반영되지 않는다.** 오류도 경고도 없다. 역할 전환 때 구성 차이로 드러난다.</a:t>
+              <a:t>•  </a:t>
+            </a:r>
+            <a:r>
+              <a:rPr sz="1600" b="1">
+                <a:solidFill>
+                  <a:srgbClr val="222222"/>
+                </a:solidFill>
+                <a:latin typeface="맑은 고딕"/>
+              </a:rPr>
+              <a:t>온라인 리두 로그 그룹 추가는 반영되지 않는다.</a:t>
+            </a:r>
+            <a:r>
+              <a:rPr sz="1600" b="0">
+                <a:solidFill>
+                  <a:srgbClr val="222222"/>
+                </a:solidFill>
+                <a:latin typeface="맑은 고딕"/>
+              </a:rPr>
+              <a:t> 오류도 경고도 없다. 역할 전환 때 구성 차이로 드러난다.</a:t>
             </a:r>
           </a:p>
           <a:p>
@@ -12090,7 +13485,45 @@
                 </a:solidFill>
                 <a:latin typeface="맑은 고딕"/>
               </a:rPr>
-              <a:t>•  구조 변경 표준 순서: DB에서 제거 → 조회로 확인 → 파일은 `mv`로 정리. `rm`은 되돌릴 수 없다.</a:t>
+              <a:t>•  구조 변경 표준 순서: DB에서 제거 → 조회로 확인 → 파일은 </a:t>
+            </a:r>
+            <a:r>
+              <a:rPr sz="1600" b="0">
+                <a:solidFill>
+                  <a:srgbClr val="222222"/>
+                </a:solidFill>
+                <a:latin typeface="Consolas"/>
+                <a:cs typeface="Consolas"/>
+              </a:rPr>
+              <a:t>mv</a:t>
+            </a:r>
+            <a:r>
+              <a:rPr sz="1600" b="0">
+                <a:solidFill>
+                  <a:srgbClr val="222222"/>
+                </a:solidFill>
+                <a:latin typeface="맑은 고딕"/>
+              </a:rPr>
+              <a:t>로 정리. </a:t>
+            </a:r>
+            <a:r>
+              <a:rPr sz="1600" b="0">
+                <a:solidFill>
+                  <a:srgbClr val="222222"/>
+                </a:solidFill>
+                <a:latin typeface="Consolas"/>
+                <a:cs typeface="Consolas"/>
+              </a:rPr>
+              <a:t>rm</a:t>
+            </a:r>
+            <a:r>
+              <a:rPr sz="1600" b="0">
+                <a:solidFill>
+                  <a:srgbClr val="222222"/>
+                </a:solidFill>
+                <a:latin typeface="맑은 고딕"/>
+              </a:rPr>
+              <a:t>은 되돌릴 수 없다.</a:t>
             </a:r>
           </a:p>
         </p:txBody>
@@ -12262,7 +13695,26 @@
                 </a:solidFill>
                 <a:latin typeface="맑은 고딕"/>
               </a:rPr>
-              <a:t>•  실습 03 — MANUAL 재현: `UNNAMED00016`과 ORA-1274·ORA-1111을 재현하고 진단한다.</a:t>
+              <a:t>•  실습 03 — MANUAL 재현: </a:t>
+            </a:r>
+            <a:r>
+              <a:rPr sz="1600" b="0">
+                <a:solidFill>
+                  <a:srgbClr val="222222"/>
+                </a:solidFill>
+                <a:latin typeface="Consolas"/>
+                <a:cs typeface="Consolas"/>
+              </a:rPr>
+              <a:t>UNNAMED00016</a:t>
+            </a:r>
+            <a:r>
+              <a:rPr sz="1600" b="0">
+                <a:solidFill>
+                  <a:srgbClr val="222222"/>
+                </a:solidFill>
+                <a:latin typeface="맑은 고딕"/>
+              </a:rPr>
+              <a:t>과 ORA-1274·ORA-1111을 재현하고 진단한다.</a:t>
             </a:r>
           </a:p>
           <a:p>
@@ -12278,7 +13730,26 @@
                 </a:solidFill>
                 <a:latin typeface="맑은 고딕"/>
               </a:rPr>
-              <a:t>•  실습 04 — UNNAMED 복구: `CREATE DATAFILE ... AS NEW`로 복구하고 데이터까지 검증한다.</a:t>
+              <a:t>•  실습 04 — UNNAMED 복구: </a:t>
+            </a:r>
+            <a:r>
+              <a:rPr sz="1600" b="0">
+                <a:solidFill>
+                  <a:srgbClr val="222222"/>
+                </a:solidFill>
+                <a:latin typeface="Consolas"/>
+                <a:cs typeface="Consolas"/>
+              </a:rPr>
+              <a:t>CREATE DATAFILE ... AS NEW</a:t>
+            </a:r>
+            <a:r>
+              <a:rPr sz="1600" b="0">
+                <a:solidFill>
+                  <a:srgbClr val="222222"/>
+                </a:solidFill>
+                <a:latin typeface="맑은 고딕"/>
+              </a:rPr>
+              <a:t>로 복구하고 데이터까지 검증한다.</a:t>
             </a:r>
           </a:p>
           <a:p>
@@ -12326,7 +13797,16 @@
                 </a:solidFill>
                 <a:latin typeface="맑은 고딕"/>
               </a:rPr>
-              <a:t>•  실습 07 — 사고 분석: CURRENT 리두 파일 삭제 사고의 오류 스택과 복구 시도를 따라간다. **재현하지 않는다.**</a:t>
+              <a:t>•  실습 07 — 사고 분석: CURRENT 리두 파일 삭제 사고의 오류 스택과 복구 시도를 따라간다. </a:t>
+            </a:r>
+            <a:r>
+              <a:rPr sz="1600" b="1">
+                <a:solidFill>
+                  <a:srgbClr val="222222"/>
+                </a:solidFill>
+                <a:latin typeface="맑은 고딕"/>
+              </a:rPr>
+              <a:t>재현하지 않는다.</a:t>
             </a:r>
           </a:p>
           <a:p>
@@ -12824,7 +14304,17 @@
                 </a:solidFill>
                 <a:latin typeface="맑은 고딕"/>
               </a:rPr>
-              <a:t>•  답의 핵심은 파라미터 하나 — `STANDBY_FILE_MANAGEMENT`</a:t>
+              <a:t>•  답의 핵심은 파라미터 하나 — </a:t>
+            </a:r>
+            <a:r>
+              <a:rPr sz="1700" b="0">
+                <a:solidFill>
+                  <a:srgbClr val="222222"/>
+                </a:solidFill>
+                <a:latin typeface="Consolas"/>
+                <a:cs typeface="Consolas"/>
+              </a:rPr>
+              <a:t>STANDBY_FILE_MANAGEMENT</a:t>
             </a:r>
           </a:p>
         </p:txBody>
@@ -13019,7 +14509,16 @@
                 </a:solidFill>
                 <a:latin typeface="맑은 고딕"/>
               </a:rPr>
-              <a:t>•  실측 : Standby만 MANUAL, Primary는 AUTO → **문제 발생**</a:t>
+              <a:t>•  실측 : Standby만 MANUAL, Primary는 AUTO → </a:t>
+            </a:r>
+            <a:r>
+              <a:rPr sz="1700" b="1">
+                <a:solidFill>
+                  <a:srgbClr val="222222"/>
+                </a:solidFill>
+                <a:latin typeface="맑은 고딕"/>
+              </a:rPr>
+              <a:t>문제 발생</a:t>
             </a:r>
           </a:p>
           <a:p>
@@ -13051,7 +14550,16 @@
                 </a:solidFill>
                 <a:latin typeface="맑은 고딕"/>
               </a:rPr>
-              <a:t>•  **확인은 반드시 Standby에서**</a:t>
+              <a:t>•  </a:t>
+            </a:r>
+            <a:r>
+              <a:rPr sz="1700" b="1">
+                <a:solidFill>
+                  <a:srgbClr val="222222"/>
+                </a:solidFill>
+                <a:latin typeface="맑은 고딕"/>
+              </a:rPr>
+              <a:t>확인은 반드시 Standby에서</a:t>
             </a:r>
           </a:p>
         </p:txBody>
@@ -13712,7 +15220,26 @@
                 </a:solidFill>
                 <a:latin typeface="맑은 고딕"/>
               </a:rPr>
-              <a:t>•  Primary : `dg_ts1_01.dbf` (비OMF, 사람이 지정)</a:t>
+              <a:t>•  Primary : </a:t>
+            </a:r>
+            <a:r>
+              <a:rPr sz="1700" b="0">
+                <a:solidFill>
+                  <a:srgbClr val="222222"/>
+                </a:solidFill>
+                <a:latin typeface="Consolas"/>
+                <a:cs typeface="Consolas"/>
+              </a:rPr>
+              <a:t>dg_ts1_01.dbf</a:t>
+            </a:r>
+            <a:r>
+              <a:rPr sz="1700" b="0">
+                <a:solidFill>
+                  <a:srgbClr val="222222"/>
+                </a:solidFill>
+                <a:latin typeface="맑은 고딕"/>
+              </a:rPr>
+              <a:t> (비OMF, 사람이 지정)</a:t>
             </a:r>
           </a:p>
           <a:p>
@@ -13728,7 +15255,26 @@
                 </a:solidFill>
                 <a:latin typeface="맑은 고딕"/>
               </a:rPr>
-              <a:t>•  Standby : `o1_mf_dg_ts1_o8z7v7lh_.dbf` (OMF, 오라클이 지정)</a:t>
+              <a:t>•  Standby : </a:t>
+            </a:r>
+            <a:r>
+              <a:rPr sz="1700" b="0">
+                <a:solidFill>
+                  <a:srgbClr val="222222"/>
+                </a:solidFill>
+                <a:latin typeface="Consolas"/>
+                <a:cs typeface="Consolas"/>
+              </a:rPr>
+              <a:t>o1_mf_dg_ts1_o8z7v7lh_.dbf</a:t>
+            </a:r>
+            <a:r>
+              <a:rPr sz="1700" b="0">
+                <a:solidFill>
+                  <a:srgbClr val="222222"/>
+                </a:solidFill>
+                <a:latin typeface="맑은 고딕"/>
+              </a:rPr>
+              <a:t> (OMF, 오라클이 지정)</a:t>
             </a:r>
           </a:p>
           <a:p>
@@ -13744,7 +15290,25 @@
                 </a:solidFill>
                 <a:latin typeface="맑은 고딕"/>
               </a:rPr>
-              <a:t>•  파일 번호는 양쪽 모두 **14**, 크기도 20MB로 같다</a:t>
+              <a:t>•  파일 번호는 양쪽 모두 </a:t>
+            </a:r>
+            <a:r>
+              <a:rPr sz="1700" b="1">
+                <a:solidFill>
+                  <a:srgbClr val="222222"/>
+                </a:solidFill>
+                <a:latin typeface="맑은 고딕"/>
+              </a:rPr>
+              <a:t>14</a:t>
+            </a:r>
+            <a:r>
+              <a:rPr sz="1700" b="0">
+                <a:solidFill>
+                  <a:srgbClr val="222222"/>
+                </a:solidFill>
+                <a:latin typeface="맑은 고딕"/>
+              </a:rPr>
+              <a:t>, 크기도 20MB로 같다</a:t>
             </a:r>
           </a:p>
           <a:p>
@@ -13760,7 +15324,16 @@
                 </a:solidFill>
                 <a:latin typeface="맑은 고딕"/>
               </a:rPr>
-              <a:t>•  **대응을 유지하는 것은 이름이 아니라 파일 번호**</a:t>
+              <a:t>•  </a:t>
+            </a:r>
+            <a:r>
+              <a:rPr sz="1700" b="1">
+                <a:solidFill>
+                  <a:srgbClr val="222222"/>
+                </a:solidFill>
+                <a:latin typeface="맑은 고딕"/>
+              </a:rPr>
+              <a:t>대응을 유지하는 것은 이름이 아니라 파일 번호</a:t>
             </a:r>
           </a:p>
         </p:txBody>
